--- a/sunum/kontrol_kulesi_sunum.pptx
+++ b/sunum/kontrol_kulesi_sunum.pptx
@@ -2082,7 +2082,7 @@
           <a:p>
             <a:r>
               <a:rPr lang="en-US" dirty="0"/>
-              <a:t>Üç katman tek çatı: Seçenek D, A+B+C'yi kapsar. Kritik mimari karar: hiçbir kaynağa yazmıyoruz — CDC ile okuyoruz. AMOS/TRAX yer değiştirmiyor; üstlerine karar katmanı geliyor. Fazlar takvimle değil metrikle geçilir.</a:t>
+              <a:t>Üç katman tek çatı: dashboard, sistem mimarisi ve akıllı uyarı yaklaşımlarını tek platformda birleştiriyoruz — case'teki örnek başlıklar ilham, bizim önerimiz bütünleşik. Kritik mimari karar: hiçbir kaynağa yazmıyoruz — CDC ile okuyoruz. AMOS/TRAX yer değiştirmiyor; üstlerine karar katmanı geliyor. Fazlar takvimle değil metrikle geçilir.</a:t>
             </a:r>
             <a:endParaRPr lang="en-US" dirty="0"/>
           </a:p>
@@ -2948,7 +2948,7 @@
                 <a:ea typeface="Courier New" pitchFamily="34" charset="-122"/>
                 <a:cs typeface="Courier New" pitchFamily="34" charset="-120"/>
               </a:rPr>
-              <a:t>GLOBAL TALENT BRIDGE · FİLO BÜYÜR, ENVANTER HAZIR MI? · SEÇENEK D</a:t>
+              <a:t>GLOBAL TALENT BRIDGE · FİLO BÜYÜR, ENVANTER HAZIR MI? · GRUP 9</a:t>
             </a:r>
             <a:endParaRPr lang="en-US" sz="1050" dirty="0"/>
           </a:p>
@@ -3380,7 +3380,7 @@
                 <a:ea typeface="Arial" pitchFamily="34" charset="-122"/>
                 <a:cs typeface="Arial" pitchFamily="34" charset="-120"/>
               </a:rPr>
-              <a:t>Grup 3 · prototip: tek dosyalık canlı dashboard + doğrulanmış hesap çekirdeği</a:t>
+              <a:t>Grup 9 · prototip: tek dosyalık canlı dashboard + doğrulanmış hesap çekirdeği</a:t>
             </a:r>
             <a:endParaRPr lang="en-US" sz="1300" dirty="0"/>
           </a:p>
@@ -4951,7 +4951,7 @@
                 <a:ea typeface="Arial" pitchFamily="34" charset="-122"/>
                 <a:cs typeface="Arial" pitchFamily="34" charset="-120"/>
               </a:rPr>
-              <a:t>Teşekkürler — canlı demo ve tüm sayıların yeniden üretimi için hazırız.  ·  Grup 3</a:t>
+              <a:t>Teşekkürler — canlı demo ve tüm sayıların yeniden üretimi için hazırız.  ·  Grup 9</a:t>
             </a:r>
             <a:endParaRPr lang="en-US" sz="1350" dirty="0"/>
           </a:p>
